--- a/DarkDecoder_Pitch.pptx
+++ b/DarkDecoder_Pitch.pptx
@@ -7971,7 +7971,7 @@
     <p:bg>
       <p:bgPr>
         <a:solidFill>
-          <a:srgbClr val="020B06"/>
+          <a:srgbClr val="0A0A0A"/>
         </a:solidFill>
       </p:bgPr>
     </p:bg>
@@ -7991,1234 +7991,130 @@
       </p:grpSpPr>
       <p:sp>
         <p:nvSpPr>
-          <p:cNvPr id="2" name="Shape 0"/>
-          <p:cNvSpPr/>
-          <p:nvPr/>
-        </p:nvSpPr>
-        <p:spPr>
-          <a:xfrm>
-            <a:off x="0" y="4956048"/>
-            <a:ext cx="9144000" cy="54864"/>
-          </a:xfrm>
-          <a:prstGeom prst="rect">
-            <a:avLst/>
-          </a:prstGeom>
-          <a:solidFill>
-            <a:srgbClr val="00FF41"/>
-          </a:solidFill>
-          <a:ln w="12700">
-            <a:solidFill>
-              <a:srgbClr val="00FF41"/>
-            </a:solidFill>
-            <a:prstDash val="solid"/>
-          </a:ln>
-        </p:spPr>
-      </p:sp>
-      <p:sp>
-        <p:nvSpPr>
-          <p:cNvPr id="3" name="Text 1"/>
-          <p:cNvSpPr/>
-          <p:nvPr/>
-        </p:nvSpPr>
-        <p:spPr>
-          <a:xfrm>
-            <a:off x="8321040" y="4773168"/>
-            <a:ext cx="731520" cy="201168"/>
-          </a:xfrm>
-          <a:prstGeom prst="rect">
-            <a:avLst/>
-          </a:prstGeom>
-          <a:noFill/>
-          <a:ln/>
-        </p:spPr>
-        <p:txBody>
-          <a:bodyPr wrap="square" rtlCol="0" anchor="ctr"/>
-          <a:lstStyle/>
-          <a:p>
-            <a:pPr algn="r" indent="0" marL="0">
-              <a:buNone/>
-            </a:pPr>
-            <a:r>
-              <a:rPr lang="en-US" sz="800" dirty="0">
-                <a:solidFill>
-                  <a:srgbClr val="4A7A55"/>
-                </a:solidFill>
-                <a:latin typeface="Consolas" pitchFamily="34" charset="0"/>
-                <a:ea typeface="Consolas" pitchFamily="34" charset="-122"/>
-                <a:cs typeface="Consolas" pitchFamily="34" charset="-120"/>
-              </a:rPr>
-              <a:t>6 / 10</a:t>
-            </a:r>
-            <a:endParaRPr lang="en-US" sz="800" dirty="0"/>
-          </a:p>
-        </p:txBody>
-      </p:sp>
-      <p:sp>
-        <p:nvSpPr>
-          <p:cNvPr id="4" name="Text 2"/>
-          <p:cNvSpPr/>
-          <p:nvPr/>
-        </p:nvSpPr>
-        <p:spPr>
-          <a:xfrm>
-            <a:off x="274320" y="4773168"/>
-            <a:ext cx="6400800" cy="201168"/>
-          </a:xfrm>
-          <a:prstGeom prst="rect">
-            <a:avLst/>
-          </a:prstGeom>
-          <a:noFill/>
-          <a:ln/>
-        </p:spPr>
-        <p:txBody>
-          <a:bodyPr wrap="square" rtlCol="0" anchor="ctr"/>
-          <a:lstStyle/>
-          <a:p>
-            <a:pPr indent="0" marL="0">
-              <a:buNone/>
-            </a:pPr>
-            <a:r>
-              <a:rPr lang="en-US" sz="750" dirty="0">
-                <a:solidFill>
-                  <a:srgbClr val="4A7A55"/>
-                </a:solidFill>
-                <a:latin typeface="Consolas" pitchFamily="34" charset="0"/>
-                <a:ea typeface="Consolas" pitchFamily="34" charset="-122"/>
-                <a:cs typeface="Consolas" pitchFamily="34" charset="-120"/>
-              </a:rPr>
-              <a:t>💀 DARKDECODER  |  Beyond Tomorrow Summit 2026</a:t>
-            </a:r>
-            <a:endParaRPr lang="en-US" sz="750" dirty="0"/>
-          </a:p>
-        </p:txBody>
-      </p:sp>
-      <p:sp>
-        <p:nvSpPr>
-          <p:cNvPr id="5" name="Text 3"/>
-          <p:cNvSpPr/>
+          <p:cNvPr id="2" name="TextBox 1"/>
+          <p:cNvSpPr txBox="1"/>
           <p:nvPr/>
         </p:nvSpPr>
         <p:spPr>
           <a:xfrm>
             <a:off x="365760" y="137160"/>
-            <a:ext cx="8229600" cy="201168"/>
-          </a:xfrm>
-          <a:prstGeom prst="rect">
-            <a:avLst/>
-          </a:prstGeom>
-          <a:noFill/>
-          <a:ln/>
-        </p:spPr>
-        <p:txBody>
-          <a:bodyPr wrap="square" rtlCol="0" anchor="ctr"/>
-          <a:lstStyle/>
-          <a:p>
-            <a:pPr indent="0" marL="0">
-              <a:buNone/>
-            </a:pPr>
-            <a:r>
-              <a:rPr lang="en-US" sz="750" spc="300" kern="0" dirty="0">
-                <a:solidFill>
-                  <a:srgbClr val="4A7A55"/>
-                </a:solidFill>
-                <a:latin typeface="Consolas" pitchFamily="34" charset="0"/>
-                <a:ea typeface="Consolas" pitchFamily="34" charset="-122"/>
-                <a:cs typeface="Consolas" pitchFamily="34" charset="-120"/>
-              </a:rPr>
-              <a:t>// IMPLEMENTATION PLAN</a:t>
-            </a:r>
-            <a:endParaRPr lang="en-US" sz="750" dirty="0"/>
-          </a:p>
-        </p:txBody>
-      </p:sp>
-      <p:sp>
-        <p:nvSpPr>
-          <p:cNvPr id="6" name="Text 4"/>
-          <p:cNvSpPr/>
-          <p:nvPr/>
-        </p:nvSpPr>
-        <p:spPr>
-          <a:xfrm>
-            <a:off x="365760" y="320040"/>
-            <a:ext cx="8412480" cy="640080"/>
-          </a:xfrm>
-          <a:prstGeom prst="rect">
-            <a:avLst/>
-          </a:prstGeom>
-          <a:noFill/>
-          <a:ln/>
-        </p:spPr>
-        <p:txBody>
-          <a:bodyPr wrap="square" rtlCol="0" anchor="ctr"/>
-          <a:lstStyle/>
-          <a:p>
-            <a:pPr indent="0" marL="0">
-              <a:buNone/>
-            </a:pPr>
-            <a:r>
-              <a:rPr lang="en-US" sz="3200" b="1" dirty="0">
+            <a:ext cx="8412480" cy="594360"/>
+          </a:xfrm>
+          <a:prstGeom prst="rect">
+            <a:avLst/>
+          </a:prstGeom>
+          <a:noFill/>
+        </p:spPr>
+        <p:txBody>
+          <a:bodyPr wrap="none">
+            <a:spAutoFit/>
+          </a:bodyPr>
+          <a:lstStyle/>
+          <a:p>
+            <a:pPr algn="l"/>
+            <a:r>
+              <a:rPr sz="2600" b="1">
                 <a:solidFill>
                   <a:srgbClr val="00FF41"/>
                 </a:solidFill>
-                <a:latin typeface="Consolas" pitchFamily="34" charset="0"/>
-                <a:ea typeface="Consolas" pitchFamily="34" charset="-122"/>
-                <a:cs typeface="Consolas" pitchFamily="34" charset="-120"/>
-              </a:rPr>
-              <a:t>How DarkDecoder Was Built</a:t>
-            </a:r>
-            <a:endParaRPr lang="en-US" sz="3200" dirty="0"/>
-          </a:p>
-        </p:txBody>
-      </p:sp>
-      <p:sp>
-        <p:nvSpPr>
-          <p:cNvPr id="7" name="Shape 5"/>
-          <p:cNvSpPr/>
-          <p:nvPr/>
-        </p:nvSpPr>
-        <p:spPr>
-          <a:xfrm>
-            <a:off x="320040" y="1170432"/>
-            <a:ext cx="320040" cy="320040"/>
-          </a:xfrm>
-          <a:prstGeom prst="ellipse">
-            <a:avLst/>
-          </a:prstGeom>
-          <a:solidFill>
-            <a:srgbClr val="00FF41"/>
-          </a:solidFill>
-          <a:ln w="12700">
-            <a:solidFill>
-              <a:srgbClr val="00FF41"/>
-            </a:solidFill>
-            <a:prstDash val="solid"/>
-          </a:ln>
-        </p:spPr>
-      </p:sp>
-      <p:sp>
-        <p:nvSpPr>
-          <p:cNvPr id="8" name="Shape 6"/>
-          <p:cNvSpPr/>
-          <p:nvPr/>
-        </p:nvSpPr>
-        <p:spPr>
-          <a:xfrm>
-            <a:off x="480060" y="1490472"/>
-            <a:ext cx="0" cy="585216"/>
-          </a:xfrm>
-          <a:prstGeom prst="line">
-            <a:avLst/>
-          </a:prstGeom>
-          <a:noFill/>
-          <a:ln w="25400">
-            <a:solidFill>
-              <a:srgbClr val="003310"/>
-            </a:solidFill>
-            <a:prstDash val="solid"/>
-          </a:ln>
-        </p:spPr>
-      </p:sp>
-      <p:sp>
-        <p:nvSpPr>
-          <p:cNvPr id="9" name="Shape 7"/>
-          <p:cNvSpPr/>
-          <p:nvPr/>
-        </p:nvSpPr>
-        <p:spPr>
-          <a:xfrm>
-            <a:off x="777240" y="1005840"/>
-            <a:ext cx="914400" cy="640080"/>
-          </a:xfrm>
-          <a:prstGeom prst="rect">
-            <a:avLst/>
-          </a:prstGeom>
-          <a:solidFill>
-            <a:srgbClr val="010804"/>
-          </a:solidFill>
-          <a:ln w="12700">
-            <a:solidFill>
-              <a:srgbClr val="00FF41"/>
-            </a:solidFill>
-            <a:prstDash val="solid"/>
-          </a:ln>
-        </p:spPr>
-      </p:sp>
-      <p:sp>
-        <p:nvSpPr>
-          <p:cNvPr id="10" name="Text 8"/>
-          <p:cNvSpPr/>
-          <p:nvPr/>
-        </p:nvSpPr>
-        <p:spPr>
-          <a:xfrm>
-            <a:off x="777240" y="1005840"/>
-            <a:ext cx="914400" cy="640080"/>
-          </a:xfrm>
-          <a:prstGeom prst="rect">
-            <a:avLst/>
-          </a:prstGeom>
-          <a:noFill/>
-          <a:ln/>
-        </p:spPr>
-        <p:txBody>
-          <a:bodyPr wrap="square" rtlCol="0" anchor="ctr"/>
-          <a:lstStyle/>
-          <a:p>
-            <a:pPr algn="ctr" indent="0" marL="0">
-              <a:buNone/>
-            </a:pPr>
-            <a:r>
-              <a:rPr lang="en-US" sz="750" b="1" dirty="0">
-                <a:solidFill>
-                  <a:srgbClr val="00FF41"/>
-                </a:solidFill>
-                <a:latin typeface="Consolas" pitchFamily="34" charset="0"/>
-                <a:ea typeface="Consolas" pitchFamily="34" charset="-122"/>
-                <a:cs typeface="Consolas" pitchFamily="34" charset="-120"/>
-              </a:rPr>
-              <a:t>Hour 1–2</a:t>
-            </a:r>
-            <a:endParaRPr lang="en-US" sz="750" dirty="0"/>
-          </a:p>
-        </p:txBody>
-      </p:sp>
-      <p:sp>
-        <p:nvSpPr>
-          <p:cNvPr id="11" name="Shape 9"/>
-          <p:cNvSpPr/>
-          <p:nvPr/>
-        </p:nvSpPr>
-        <p:spPr>
-          <a:xfrm>
-            <a:off x="1828800" y="1005840"/>
-            <a:ext cx="6995160" cy="640080"/>
-          </a:xfrm>
-          <a:prstGeom prst="rect">
-            <a:avLst/>
-          </a:prstGeom>
-          <a:solidFill>
-            <a:srgbClr val="010804"/>
-          </a:solidFill>
-          <a:ln w="12700">
-            <a:solidFill>
-              <a:srgbClr val="003310"/>
-            </a:solidFill>
-            <a:prstDash val="solid"/>
-          </a:ln>
-        </p:spPr>
-      </p:sp>
-      <p:sp>
-        <p:nvSpPr>
-          <p:cNvPr id="12" name="Text 10"/>
-          <p:cNvSpPr/>
-          <p:nvPr/>
-        </p:nvSpPr>
-        <p:spPr>
-          <a:xfrm>
-            <a:off x="1920240" y="1042416"/>
-            <a:ext cx="2743200" cy="256032"/>
-          </a:xfrm>
-          <a:prstGeom prst="rect">
-            <a:avLst/>
-          </a:prstGeom>
-          <a:noFill/>
-          <a:ln/>
-        </p:spPr>
-        <p:txBody>
-          <a:bodyPr wrap="square" rtlCol="0" anchor="ctr"/>
-          <a:lstStyle/>
-          <a:p>
-            <a:pPr indent="0" marL="0">
-              <a:buNone/>
-            </a:pPr>
-            <a:r>
-              <a:rPr lang="en-US" sz="1100" b="1" dirty="0">
-                <a:solidFill>
-                  <a:srgbClr val="00FF41"/>
-                </a:solidFill>
-                <a:latin typeface="Consolas" pitchFamily="34" charset="0"/>
-                <a:ea typeface="Consolas" pitchFamily="34" charset="-122"/>
-                <a:cs typeface="Consolas" pitchFamily="34" charset="-120"/>
-              </a:rPr>
-              <a:t>Architecture &amp; Setup</a:t>
-            </a:r>
-            <a:endParaRPr lang="en-US" sz="1100" dirty="0"/>
-          </a:p>
-        </p:txBody>
-      </p:sp>
-      <p:sp>
-        <p:nvSpPr>
-          <p:cNvPr id="13" name="Text 11"/>
-          <p:cNvSpPr/>
-          <p:nvPr/>
-        </p:nvSpPr>
-        <p:spPr>
-          <a:xfrm>
-            <a:off x="1920240" y="1316736"/>
-            <a:ext cx="6766560" cy="274320"/>
-          </a:xfrm>
-          <a:prstGeom prst="rect">
-            <a:avLst/>
-          </a:prstGeom>
-          <a:noFill/>
-          <a:ln/>
-        </p:spPr>
-        <p:txBody>
-          <a:bodyPr wrap="square" rtlCol="0" anchor="ctr"/>
-          <a:lstStyle/>
-          <a:p>
-            <a:pPr indent="0" marL="0">
-              <a:buNone/>
-            </a:pPr>
-            <a:r>
-              <a:rPr lang="en-US" sz="850" dirty="0">
-                <a:solidFill>
-                  <a:srgbClr val="C8FFD4"/>
-                </a:solidFill>
-                <a:latin typeface="Calibri" pitchFamily="34" charset="0"/>
-                <a:ea typeface="Calibri" pitchFamily="34" charset="-122"/>
-                <a:cs typeface="Calibri" pitchFamily="34" charset="-120"/>
-              </a:rPr>
-              <a:t>Project scaffolding — analyzer.py, app.py, ai_analyzer.py, redteam_analyzer.py   ·   Groq API integration with llama-3.3-70b   ·   MITRE ATT&amp;CK + ATLAS corpus embedded in system prompts</a:t>
-            </a:r>
-            <a:endParaRPr lang="en-US" sz="850" dirty="0"/>
-          </a:p>
-        </p:txBody>
-      </p:sp>
-      <p:sp>
-        <p:nvSpPr>
-          <p:cNvPr id="14" name="Shape 12"/>
-          <p:cNvSpPr/>
-          <p:nvPr/>
-        </p:nvSpPr>
-        <p:spPr>
-          <a:xfrm>
-            <a:off x="320040" y="1920240"/>
-            <a:ext cx="320040" cy="320040"/>
-          </a:xfrm>
-          <a:prstGeom prst="ellipse">
-            <a:avLst/>
-          </a:prstGeom>
-          <a:solidFill>
-            <a:srgbClr val="00FF41"/>
-          </a:solidFill>
-          <a:ln w="12700">
-            <a:solidFill>
-              <a:srgbClr val="00FF41"/>
-            </a:solidFill>
-            <a:prstDash val="solid"/>
-          </a:ln>
-        </p:spPr>
-      </p:sp>
-      <p:sp>
-        <p:nvSpPr>
-          <p:cNvPr id="15" name="Shape 13"/>
-          <p:cNvSpPr/>
-          <p:nvPr/>
-        </p:nvSpPr>
-        <p:spPr>
-          <a:xfrm>
-            <a:off x="480060" y="2240280"/>
-            <a:ext cx="0" cy="585216"/>
-          </a:xfrm>
-          <a:prstGeom prst="line">
-            <a:avLst/>
-          </a:prstGeom>
-          <a:noFill/>
-          <a:ln w="25400">
-            <a:solidFill>
-              <a:srgbClr val="003310"/>
-            </a:solidFill>
-            <a:prstDash val="solid"/>
-          </a:ln>
-        </p:spPr>
-      </p:sp>
-      <p:sp>
-        <p:nvSpPr>
-          <p:cNvPr id="16" name="Shape 14"/>
-          <p:cNvSpPr/>
-          <p:nvPr/>
-        </p:nvSpPr>
-        <p:spPr>
-          <a:xfrm>
-            <a:off x="777240" y="1755648"/>
-            <a:ext cx="914400" cy="640080"/>
-          </a:xfrm>
-          <a:prstGeom prst="rect">
-            <a:avLst/>
-          </a:prstGeom>
-          <a:solidFill>
-            <a:srgbClr val="010804"/>
-          </a:solidFill>
-          <a:ln w="12700">
-            <a:solidFill>
-              <a:srgbClr val="00FF41"/>
-            </a:solidFill>
-            <a:prstDash val="solid"/>
-          </a:ln>
-        </p:spPr>
-      </p:sp>
-      <p:sp>
-        <p:nvSpPr>
-          <p:cNvPr id="17" name="Text 15"/>
-          <p:cNvSpPr/>
-          <p:nvPr/>
-        </p:nvSpPr>
-        <p:spPr>
-          <a:xfrm>
-            <a:off x="777240" y="1755648"/>
-            <a:ext cx="914400" cy="640080"/>
-          </a:xfrm>
-          <a:prstGeom prst="rect">
-            <a:avLst/>
-          </a:prstGeom>
-          <a:noFill/>
-          <a:ln/>
-        </p:spPr>
-        <p:txBody>
-          <a:bodyPr wrap="square" rtlCol="0" anchor="ctr"/>
-          <a:lstStyle/>
-          <a:p>
-            <a:pPr algn="ctr" indent="0" marL="0">
-              <a:buNone/>
-            </a:pPr>
-            <a:r>
-              <a:rPr lang="en-US" sz="750" b="1" dirty="0">
-                <a:solidFill>
-                  <a:srgbClr val="00FF41"/>
-                </a:solidFill>
-                <a:latin typeface="Consolas" pitchFamily="34" charset="0"/>
-                <a:ea typeface="Consolas" pitchFamily="34" charset="-122"/>
-                <a:cs typeface="Consolas" pitchFamily="34" charset="-120"/>
-              </a:rPr>
-              <a:t>Hour 3–5</a:t>
-            </a:r>
-            <a:endParaRPr lang="en-US" sz="750" dirty="0"/>
-          </a:p>
-        </p:txBody>
-      </p:sp>
-      <p:sp>
-        <p:nvSpPr>
-          <p:cNvPr id="18" name="Shape 16"/>
-          <p:cNvSpPr/>
-          <p:nvPr/>
-        </p:nvSpPr>
-        <p:spPr>
-          <a:xfrm>
-            <a:off x="1828800" y="1755648"/>
-            <a:ext cx="6995160" cy="640080"/>
-          </a:xfrm>
-          <a:prstGeom prst="rect">
-            <a:avLst/>
-          </a:prstGeom>
-          <a:solidFill>
-            <a:srgbClr val="010804"/>
-          </a:solidFill>
-          <a:ln w="12700">
-            <a:solidFill>
-              <a:srgbClr val="003310"/>
-            </a:solidFill>
-            <a:prstDash val="solid"/>
-          </a:ln>
-        </p:spPr>
-      </p:sp>
-      <p:sp>
-        <p:nvSpPr>
-          <p:cNvPr id="19" name="Text 17"/>
-          <p:cNvSpPr/>
-          <p:nvPr/>
-        </p:nvSpPr>
-        <p:spPr>
-          <a:xfrm>
-            <a:off x="1920240" y="1792224"/>
-            <a:ext cx="2743200" cy="256032"/>
-          </a:xfrm>
-          <a:prstGeom prst="rect">
-            <a:avLst/>
-          </a:prstGeom>
-          <a:noFill/>
-          <a:ln/>
-        </p:spPr>
-        <p:txBody>
-          <a:bodyPr wrap="square" rtlCol="0" anchor="ctr"/>
-          <a:lstStyle/>
-          <a:p>
-            <a:pPr indent="0" marL="0">
-              <a:buNone/>
-            </a:pPr>
-            <a:r>
-              <a:rPr lang="en-US" sz="1100" b="1" dirty="0">
-                <a:solidFill>
-                  <a:srgbClr val="00FF41"/>
-                </a:solidFill>
-                <a:latin typeface="Consolas" pitchFamily="34" charset="0"/>
-                <a:ea typeface="Consolas" pitchFamily="34" charset="-122"/>
-                <a:cs typeface="Consolas" pitchFamily="34" charset="-120"/>
-              </a:rPr>
-              <a:t>Core Malware Scanner</a:t>
-            </a:r>
-            <a:endParaRPr lang="en-US" sz="1100" dirty="0"/>
-          </a:p>
-        </p:txBody>
-      </p:sp>
-      <p:sp>
-        <p:nvSpPr>
-          <p:cNvPr id="20" name="Text 18"/>
-          <p:cNvSpPr/>
-          <p:nvPr/>
-        </p:nvSpPr>
-        <p:spPr>
-          <a:xfrm>
-            <a:off x="1920240" y="2066544"/>
-            <a:ext cx="6766560" cy="274320"/>
-          </a:xfrm>
-          <a:prstGeom prst="rect">
-            <a:avLst/>
-          </a:prstGeom>
-          <a:noFill/>
-          <a:ln/>
-        </p:spPr>
-        <p:txBody>
-          <a:bodyPr wrap="square" rtlCol="0" anchor="ctr"/>
-          <a:lstStyle/>
-          <a:p>
-            <a:pPr indent="0" marL="0">
-              <a:buNone/>
-            </a:pPr>
-            <a:r>
-              <a:rPr lang="en-US" sz="850" dirty="0">
-                <a:solidFill>
-                  <a:srgbClr val="C8FFD4"/>
-                </a:solidFill>
-                <a:latin typeface="Calibri" pitchFamily="34" charset="0"/>
-                <a:ea typeface="Calibri" pitchFamily="34" charset="-122"/>
-                <a:cs typeface="Calibri" pitchFamily="34" charset="-120"/>
-              </a:rPr>
-              <a:t>Deobfuscation pipeline for base64, hex, eval chains   ·   Structured JSON output: IOCs, techniques, danger score   ·   Streamlit UI with hacker terminal aesthetic</a:t>
-            </a:r>
-            <a:endParaRPr lang="en-US" sz="850" dirty="0"/>
-          </a:p>
-        </p:txBody>
-      </p:sp>
-      <p:sp>
-        <p:nvSpPr>
-          <p:cNvPr id="21" name="Shape 19"/>
-          <p:cNvSpPr/>
-          <p:nvPr/>
-        </p:nvSpPr>
-        <p:spPr>
-          <a:xfrm>
-            <a:off x="320040" y="2670048"/>
-            <a:ext cx="320040" cy="320040"/>
-          </a:xfrm>
-          <a:prstGeom prst="ellipse">
-            <a:avLst/>
-          </a:prstGeom>
-          <a:solidFill>
-            <a:srgbClr val="79B8FF"/>
-          </a:solidFill>
-          <a:ln w="12700">
-            <a:solidFill>
-              <a:srgbClr val="79B8FF"/>
-            </a:solidFill>
-            <a:prstDash val="solid"/>
-          </a:ln>
-        </p:spPr>
-      </p:sp>
-      <p:sp>
-        <p:nvSpPr>
-          <p:cNvPr id="22" name="Shape 20"/>
-          <p:cNvSpPr/>
-          <p:nvPr/>
-        </p:nvSpPr>
-        <p:spPr>
-          <a:xfrm>
-            <a:off x="480060" y="2990088"/>
-            <a:ext cx="0" cy="585216"/>
-          </a:xfrm>
-          <a:prstGeom prst="line">
-            <a:avLst/>
-          </a:prstGeom>
-          <a:noFill/>
-          <a:ln w="25400">
-            <a:solidFill>
-              <a:srgbClr val="003310"/>
-            </a:solidFill>
-            <a:prstDash val="solid"/>
-          </a:ln>
-        </p:spPr>
-      </p:sp>
-      <p:sp>
-        <p:nvSpPr>
-          <p:cNvPr id="23" name="Shape 21"/>
-          <p:cNvSpPr/>
-          <p:nvPr/>
-        </p:nvSpPr>
-        <p:spPr>
-          <a:xfrm>
-            <a:off x="777240" y="2505456"/>
-            <a:ext cx="914400" cy="640080"/>
-          </a:xfrm>
-          <a:prstGeom prst="rect">
-            <a:avLst/>
-          </a:prstGeom>
-          <a:solidFill>
-            <a:srgbClr val="010804"/>
-          </a:solidFill>
-          <a:ln w="12700">
-            <a:solidFill>
-              <a:srgbClr val="79B8FF"/>
-            </a:solidFill>
-            <a:prstDash val="solid"/>
-          </a:ln>
-        </p:spPr>
-      </p:sp>
-      <p:sp>
-        <p:nvSpPr>
-          <p:cNvPr id="24" name="Text 22"/>
-          <p:cNvSpPr/>
-          <p:nvPr/>
-        </p:nvSpPr>
-        <p:spPr>
-          <a:xfrm>
-            <a:off x="777240" y="2505456"/>
-            <a:ext cx="914400" cy="640080"/>
-          </a:xfrm>
-          <a:prstGeom prst="rect">
-            <a:avLst/>
-          </a:prstGeom>
-          <a:noFill/>
-          <a:ln/>
-        </p:spPr>
-        <p:txBody>
-          <a:bodyPr wrap="square" rtlCol="0" anchor="ctr"/>
-          <a:lstStyle/>
-          <a:p>
-            <a:pPr algn="ctr" indent="0" marL="0">
-              <a:buNone/>
-            </a:pPr>
-            <a:r>
-              <a:rPr lang="en-US" sz="750" b="1" dirty="0">
-                <a:solidFill>
-                  <a:srgbClr val="79B8FF"/>
-                </a:solidFill>
-                <a:latin typeface="Consolas" pitchFamily="34" charset="0"/>
-                <a:ea typeface="Consolas" pitchFamily="34" charset="-122"/>
-                <a:cs typeface="Consolas" pitchFamily="34" charset="-120"/>
-              </a:rPr>
-              <a:t>Hour 6–8</a:t>
-            </a:r>
-            <a:endParaRPr lang="en-US" sz="750" dirty="0"/>
-          </a:p>
-        </p:txBody>
-      </p:sp>
-      <p:sp>
-        <p:nvSpPr>
-          <p:cNvPr id="25" name="Shape 23"/>
-          <p:cNvSpPr/>
-          <p:nvPr/>
-        </p:nvSpPr>
-        <p:spPr>
-          <a:xfrm>
-            <a:off x="1828800" y="2505456"/>
-            <a:ext cx="6995160" cy="640080"/>
-          </a:xfrm>
-          <a:prstGeom prst="rect">
-            <a:avLst/>
-          </a:prstGeom>
-          <a:solidFill>
-            <a:srgbClr val="010804"/>
-          </a:solidFill>
-          <a:ln w="12700">
-            <a:solidFill>
-              <a:srgbClr val="003310"/>
-            </a:solidFill>
-            <a:prstDash val="solid"/>
-          </a:ln>
-        </p:spPr>
-      </p:sp>
-      <p:sp>
-        <p:nvSpPr>
-          <p:cNvPr id="26" name="Text 24"/>
-          <p:cNvSpPr/>
-          <p:nvPr/>
-        </p:nvSpPr>
-        <p:spPr>
-          <a:xfrm>
-            <a:off x="1920240" y="2542032"/>
-            <a:ext cx="2743200" cy="256032"/>
-          </a:xfrm>
-          <a:prstGeom prst="rect">
-            <a:avLst/>
-          </a:prstGeom>
-          <a:noFill/>
-          <a:ln/>
-        </p:spPr>
-        <p:txBody>
-          <a:bodyPr wrap="square" rtlCol="0" anchor="ctr"/>
-          <a:lstStyle/>
-          <a:p>
-            <a:pPr indent="0" marL="0">
-              <a:buNone/>
-            </a:pPr>
-            <a:r>
-              <a:rPr lang="en-US" sz="1100" b="1" dirty="0">
-                <a:solidFill>
-                  <a:srgbClr val="79B8FF"/>
-                </a:solidFill>
-                <a:latin typeface="Consolas" pitchFamily="34" charset="0"/>
-                <a:ea typeface="Consolas" pitchFamily="34" charset="-122"/>
-                <a:cs typeface="Consolas" pitchFamily="34" charset="-120"/>
-              </a:rPr>
-              <a:t>AI Threat Analyzer</a:t>
-            </a:r>
-            <a:endParaRPr lang="en-US" sz="1100" dirty="0"/>
-          </a:p>
-        </p:txBody>
-      </p:sp>
-      <p:sp>
-        <p:nvSpPr>
-          <p:cNvPr id="27" name="Text 25"/>
-          <p:cNvSpPr/>
-          <p:nvPr/>
-        </p:nvSpPr>
-        <p:spPr>
-          <a:xfrm>
-            <a:off x="1920240" y="2816352"/>
-            <a:ext cx="6766560" cy="274320"/>
-          </a:xfrm>
-          <a:prstGeom prst="rect">
-            <a:avLst/>
-          </a:prstGeom>
-          <a:noFill/>
-          <a:ln/>
-        </p:spPr>
-        <p:txBody>
-          <a:bodyPr wrap="square" rtlCol="0" anchor="ctr"/>
-          <a:lstStyle/>
-          <a:p>
-            <a:pPr indent="0" marL="0">
-              <a:buNone/>
-            </a:pPr>
-            <a:r>
-              <a:rPr lang="en-US" sz="850" dirty="0">
-                <a:solidFill>
-                  <a:srgbClr val="C8FFD4"/>
-                </a:solidFill>
-                <a:latin typeface="Calibri" pitchFamily="34" charset="0"/>
-                <a:ea typeface="Calibri" pitchFamily="34" charset="-122"/>
-                <a:cs typeface="Calibri" pitchFamily="34" charset="-120"/>
-              </a:rPr>
-              <a:t>MITRE ATLAS technique corpus integration (AML.TXXXX)   ·   4 input modes: prompt, dataset, system prompt, query log   ·   Adversarial pattern + evasion indicator extraction</a:t>
-            </a:r>
-            <a:endParaRPr lang="en-US" sz="850" dirty="0"/>
-          </a:p>
-        </p:txBody>
-      </p:sp>
-      <p:sp>
-        <p:nvSpPr>
-          <p:cNvPr id="28" name="Shape 26"/>
-          <p:cNvSpPr/>
-          <p:nvPr/>
-        </p:nvSpPr>
-        <p:spPr>
-          <a:xfrm>
-            <a:off x="320040" y="3419856"/>
-            <a:ext cx="320040" cy="320040"/>
-          </a:xfrm>
-          <a:prstGeom prst="ellipse">
-            <a:avLst/>
-          </a:prstGeom>
-          <a:solidFill>
-            <a:srgbClr val="FF2020"/>
-          </a:solidFill>
-          <a:ln w="12700">
-            <a:solidFill>
-              <a:srgbClr val="FF2020"/>
-            </a:solidFill>
-            <a:prstDash val="solid"/>
-          </a:ln>
-        </p:spPr>
-      </p:sp>
-      <p:sp>
-        <p:nvSpPr>
-          <p:cNvPr id="29" name="Shape 27"/>
-          <p:cNvSpPr/>
-          <p:nvPr/>
-        </p:nvSpPr>
-        <p:spPr>
-          <a:xfrm>
-            <a:off x="480060" y="3739896"/>
-            <a:ext cx="0" cy="585216"/>
-          </a:xfrm>
-          <a:prstGeom prst="line">
-            <a:avLst/>
-          </a:prstGeom>
-          <a:noFill/>
-          <a:ln w="25400">
-            <a:solidFill>
-              <a:srgbClr val="003310"/>
-            </a:solidFill>
-            <a:prstDash val="solid"/>
-          </a:ln>
-        </p:spPr>
-      </p:sp>
-      <p:sp>
-        <p:nvSpPr>
-          <p:cNvPr id="30" name="Shape 28"/>
-          <p:cNvSpPr/>
-          <p:nvPr/>
-        </p:nvSpPr>
-        <p:spPr>
-          <a:xfrm>
-            <a:off x="777240" y="3255264"/>
-            <a:ext cx="914400" cy="640080"/>
-          </a:xfrm>
-          <a:prstGeom prst="rect">
-            <a:avLst/>
-          </a:prstGeom>
-          <a:solidFill>
-            <a:srgbClr val="010804"/>
-          </a:solidFill>
-          <a:ln w="12700">
-            <a:solidFill>
-              <a:srgbClr val="FF2020"/>
-            </a:solidFill>
-            <a:prstDash val="solid"/>
-          </a:ln>
-        </p:spPr>
-      </p:sp>
-      <p:sp>
-        <p:nvSpPr>
-          <p:cNvPr id="31" name="Text 29"/>
-          <p:cNvSpPr/>
-          <p:nvPr/>
-        </p:nvSpPr>
-        <p:spPr>
-          <a:xfrm>
-            <a:off x="777240" y="3255264"/>
-            <a:ext cx="914400" cy="640080"/>
-          </a:xfrm>
-          <a:prstGeom prst="rect">
-            <a:avLst/>
-          </a:prstGeom>
-          <a:noFill/>
-          <a:ln/>
-        </p:spPr>
-        <p:txBody>
-          <a:bodyPr wrap="square" rtlCol="0" anchor="ctr"/>
-          <a:lstStyle/>
-          <a:p>
-            <a:pPr algn="ctr" indent="0" marL="0">
-              <a:buNone/>
-            </a:pPr>
-            <a:r>
-              <a:rPr lang="en-US" sz="750" b="1" dirty="0">
-                <a:solidFill>
-                  <a:srgbClr val="FF2020"/>
-                </a:solidFill>
-                <a:latin typeface="Consolas" pitchFamily="34" charset="0"/>
-                <a:ea typeface="Consolas" pitchFamily="34" charset="-122"/>
-                <a:cs typeface="Consolas" pitchFamily="34" charset="-120"/>
-              </a:rPr>
-              <a:t>Hour 9–10</a:t>
-            </a:r>
-            <a:endParaRPr lang="en-US" sz="750" dirty="0"/>
-          </a:p>
-        </p:txBody>
-      </p:sp>
-      <p:sp>
-        <p:nvSpPr>
-          <p:cNvPr id="32" name="Shape 30"/>
-          <p:cNvSpPr/>
-          <p:nvPr/>
-        </p:nvSpPr>
-        <p:spPr>
-          <a:xfrm>
-            <a:off x="1828800" y="3255264"/>
-            <a:ext cx="6995160" cy="640080"/>
-          </a:xfrm>
-          <a:prstGeom prst="rect">
-            <a:avLst/>
-          </a:prstGeom>
-          <a:solidFill>
-            <a:srgbClr val="010804"/>
-          </a:solidFill>
-          <a:ln w="12700">
-            <a:solidFill>
-              <a:srgbClr val="003310"/>
-            </a:solidFill>
-            <a:prstDash val="solid"/>
-          </a:ln>
-        </p:spPr>
-      </p:sp>
-      <p:sp>
-        <p:nvSpPr>
-          <p:cNvPr id="33" name="Text 31"/>
-          <p:cNvSpPr/>
-          <p:nvPr/>
-        </p:nvSpPr>
-        <p:spPr>
-          <a:xfrm>
-            <a:off x="1920240" y="3291840"/>
-            <a:ext cx="2743200" cy="256032"/>
-          </a:xfrm>
-          <a:prstGeom prst="rect">
-            <a:avLst/>
-          </a:prstGeom>
-          <a:noFill/>
-          <a:ln/>
-        </p:spPr>
-        <p:txBody>
-          <a:bodyPr wrap="square" rtlCol="0" anchor="ctr"/>
-          <a:lstStyle/>
-          <a:p>
-            <a:pPr indent="0" marL="0">
-              <a:buNone/>
-            </a:pPr>
-            <a:r>
-              <a:rPr lang="en-US" sz="1100" b="1" dirty="0">
-                <a:solidFill>
-                  <a:srgbClr val="FF2020"/>
-                </a:solidFill>
-                <a:latin typeface="Consolas" pitchFamily="34" charset="0"/>
-                <a:ea typeface="Consolas" pitchFamily="34" charset="-122"/>
-                <a:cs typeface="Consolas" pitchFamily="34" charset="-120"/>
-              </a:rPr>
-              <a:t>Red Team Intel</a:t>
-            </a:r>
-            <a:endParaRPr lang="en-US" sz="1100" dirty="0"/>
-          </a:p>
-        </p:txBody>
-      </p:sp>
-      <p:sp>
-        <p:nvSpPr>
-          <p:cNvPr id="34" name="Text 32"/>
-          <p:cNvSpPr/>
-          <p:nvPr/>
-        </p:nvSpPr>
-        <p:spPr>
-          <a:xfrm>
-            <a:off x="1920240" y="3566160"/>
-            <a:ext cx="6766560" cy="274320"/>
-          </a:xfrm>
-          <a:prstGeom prst="rect">
-            <a:avLst/>
-          </a:prstGeom>
-          <a:noFill/>
-          <a:ln/>
-        </p:spPr>
-        <p:txBody>
-          <a:bodyPr wrap="square" rtlCol="0" anchor="ctr"/>
-          <a:lstStyle/>
-          <a:p>
-            <a:pPr indent="0" marL="0">
-              <a:buNone/>
-            </a:pPr>
-            <a:r>
-              <a:rPr lang="en-US" sz="850" dirty="0">
-                <a:solidFill>
-                  <a:srgbClr val="C8FFD4"/>
-                </a:solidFill>
-                <a:latin typeface="Calibri" pitchFamily="34" charset="0"/>
-                <a:ea typeface="Calibri" pitchFamily="34" charset="-122"/>
-                <a:cs typeface="Calibri" pitchFamily="34" charset="-120"/>
-              </a:rPr>
-              <a:t>10-phase ATT&amp;CK kill chain grid visualization   ·   Weaponization scoring, stealth rating, CVSS vector   ·   Attack narrative + APT group similarity analysis</a:t>
-            </a:r>
-            <a:endParaRPr lang="en-US" sz="850" dirty="0"/>
-          </a:p>
-        </p:txBody>
-      </p:sp>
-      <p:sp>
-        <p:nvSpPr>
-          <p:cNvPr id="35" name="Shape 33"/>
-          <p:cNvSpPr/>
-          <p:nvPr/>
-        </p:nvSpPr>
-        <p:spPr>
-          <a:xfrm>
-            <a:off x="320040" y="4169664"/>
-            <a:ext cx="320040" cy="320040"/>
-          </a:xfrm>
-          <a:prstGeom prst="ellipse">
-            <a:avLst/>
-          </a:prstGeom>
-          <a:solidFill>
-            <a:srgbClr val="FFA657"/>
-          </a:solidFill>
-          <a:ln w="12700">
-            <a:solidFill>
-              <a:srgbClr val="FFA657"/>
-            </a:solidFill>
-            <a:prstDash val="solid"/>
-          </a:ln>
-        </p:spPr>
-      </p:sp>
-      <p:sp>
-        <p:nvSpPr>
-          <p:cNvPr id="36" name="Shape 34"/>
-          <p:cNvSpPr/>
-          <p:nvPr/>
-        </p:nvSpPr>
-        <p:spPr>
-          <a:xfrm>
-            <a:off x="777240" y="4005072"/>
-            <a:ext cx="914400" cy="640080"/>
-          </a:xfrm>
-          <a:prstGeom prst="rect">
-            <a:avLst/>
-          </a:prstGeom>
-          <a:solidFill>
-            <a:srgbClr val="010804"/>
-          </a:solidFill>
-          <a:ln w="12700">
-            <a:solidFill>
-              <a:srgbClr val="FFA657"/>
-            </a:solidFill>
-            <a:prstDash val="solid"/>
-          </a:ln>
-        </p:spPr>
-      </p:sp>
-      <p:sp>
-        <p:nvSpPr>
-          <p:cNvPr id="37" name="Text 35"/>
-          <p:cNvSpPr/>
-          <p:nvPr/>
-        </p:nvSpPr>
-        <p:spPr>
-          <a:xfrm>
-            <a:off x="777240" y="4005072"/>
-            <a:ext cx="914400" cy="640080"/>
-          </a:xfrm>
-          <a:prstGeom prst="rect">
-            <a:avLst/>
-          </a:prstGeom>
-          <a:noFill/>
-          <a:ln/>
-        </p:spPr>
-        <p:txBody>
-          <a:bodyPr wrap="square" rtlCol="0" anchor="ctr"/>
-          <a:lstStyle/>
-          <a:p>
-            <a:pPr algn="ctr" indent="0" marL="0">
-              <a:buNone/>
-            </a:pPr>
-            <a:r>
-              <a:rPr lang="en-US" sz="750" b="1" dirty="0">
-                <a:solidFill>
-                  <a:srgbClr val="FFA657"/>
-                </a:solidFill>
-                <a:latin typeface="Consolas" pitchFamily="34" charset="0"/>
-                <a:ea typeface="Consolas" pitchFamily="34" charset="-122"/>
-                <a:cs typeface="Consolas" pitchFamily="34" charset="-120"/>
-              </a:rPr>
-              <a:t>Hour 11–12</a:t>
-            </a:r>
-            <a:endParaRPr lang="en-US" sz="750" dirty="0"/>
-          </a:p>
-        </p:txBody>
-      </p:sp>
-      <p:sp>
-        <p:nvSpPr>
-          <p:cNvPr id="38" name="Shape 36"/>
-          <p:cNvSpPr/>
-          <p:nvPr/>
-        </p:nvSpPr>
-        <p:spPr>
-          <a:xfrm>
-            <a:off x="1828800" y="4005072"/>
-            <a:ext cx="6995160" cy="640080"/>
-          </a:xfrm>
-          <a:prstGeom prst="rect">
-            <a:avLst/>
-          </a:prstGeom>
-          <a:solidFill>
-            <a:srgbClr val="010804"/>
-          </a:solidFill>
-          <a:ln w="12700">
-            <a:solidFill>
-              <a:srgbClr val="003310"/>
-            </a:solidFill>
-            <a:prstDash val="solid"/>
-          </a:ln>
-        </p:spPr>
-      </p:sp>
-      <p:sp>
-        <p:nvSpPr>
-          <p:cNvPr id="39" name="Text 37"/>
-          <p:cNvSpPr/>
-          <p:nvPr/>
-        </p:nvSpPr>
-        <p:spPr>
-          <a:xfrm>
-            <a:off x="1920240" y="4041648"/>
-            <a:ext cx="2743200" cy="256032"/>
-          </a:xfrm>
-          <a:prstGeom prst="rect">
-            <a:avLst/>
-          </a:prstGeom>
-          <a:noFill/>
-          <a:ln/>
-        </p:spPr>
-        <p:txBody>
-          <a:bodyPr wrap="square" rtlCol="0" anchor="ctr"/>
-          <a:lstStyle/>
-          <a:p>
-            <a:pPr indent="0" marL="0">
-              <a:buNone/>
-            </a:pPr>
-            <a:r>
-              <a:rPr lang="en-US" sz="1100" b="1" dirty="0">
-                <a:solidFill>
-                  <a:srgbClr val="FFA657"/>
-                </a:solidFill>
-                <a:latin typeface="Consolas" pitchFamily="34" charset="0"/>
-                <a:ea typeface="Consolas" pitchFamily="34" charset="-122"/>
-                <a:cs typeface="Consolas" pitchFamily="34" charset="-120"/>
-              </a:rPr>
-              <a:t>Polish &amp; Export</a:t>
-            </a:r>
-            <a:endParaRPr lang="en-US" sz="1100" dirty="0"/>
-          </a:p>
-        </p:txBody>
-      </p:sp>
-      <p:sp>
-        <p:nvSpPr>
-          <p:cNvPr id="40" name="Text 38"/>
-          <p:cNvSpPr/>
-          <p:nvPr/>
-        </p:nvSpPr>
-        <p:spPr>
-          <a:xfrm>
-            <a:off x="1920240" y="4315968"/>
-            <a:ext cx="6766560" cy="274320"/>
-          </a:xfrm>
-          <a:prstGeom prst="rect">
-            <a:avLst/>
-          </a:prstGeom>
-          <a:noFill/>
-          <a:ln/>
-        </p:spPr>
-        <p:txBody>
-          <a:bodyPr wrap="square" rtlCol="0" anchor="ctr"/>
-          <a:lstStyle/>
-          <a:p>
-            <a:pPr indent="0" marL="0">
-              <a:buNone/>
-            </a:pPr>
-            <a:r>
-              <a:rPr lang="en-US" sz="850" dirty="0">
-                <a:solidFill>
-                  <a:srgbClr val="C8FFD4"/>
-                </a:solidFill>
-                <a:latin typeface="Calibri" pitchFamily="34" charset="0"/>
-                <a:ea typeface="Calibri" pitchFamily="34" charset="-122"/>
-                <a:cs typeface="Calibri" pitchFamily="34" charset="-120"/>
-              </a:rPr>
-              <a:t>File upload (.py .js .php .ps1 .sh .bat)   ·   PDF report generator with fpdf2 — branded, professional   ·   Attack timeline, session history, stats dashboard</a:t>
-            </a:r>
-            <a:endParaRPr lang="en-US" sz="850" dirty="0"/>
+                <a:latin typeface="Courier New"/>
+              </a:rPr>
+              <a:t>[ PLATFORM IN ACTION ]</a:t>
+            </a:r>
+          </a:p>
+        </p:txBody>
+      </p:sp>
+      <p:sp>
+        <p:nvSpPr>
+          <p:cNvPr id="3" name="TextBox 2"/>
+          <p:cNvSpPr txBox="1"/>
+          <p:nvPr/>
+        </p:nvSpPr>
+        <p:spPr>
+          <a:xfrm>
+            <a:off x="365760" y="713232"/>
+            <a:ext cx="8412480" cy="320040"/>
+          </a:xfrm>
+          <a:prstGeom prst="rect">
+            <a:avLst/>
+          </a:prstGeom>
+          <a:noFill/>
+        </p:spPr>
+        <p:txBody>
+          <a:bodyPr wrap="none">
+            <a:spAutoFit/>
+          </a:bodyPr>
+          <a:lstStyle/>
+          <a:p>
+            <a:pPr algn="l"/>
+            <a:r>
+              <a:rPr sz="1100">
+                <a:solidFill>
+                  <a:srgbClr val="00CC33"/>
+                </a:solidFill>
+                <a:latin typeface="Courier New"/>
+              </a:rPr>
+              <a:t>Live system — real scan results — zero manual setup</a:t>
+            </a:r>
+          </a:p>
+        </p:txBody>
+      </p:sp>
+      <p:pic>
+        <p:nvPicPr>
+          <p:cNvPr id="4" name="Picture 3" descr="screenshot.png"/>
+          <p:cNvPicPr>
+            <a:picLocks noChangeAspect="1"/>
+          </p:cNvPicPr>
+          <p:nvPr/>
+        </p:nvPicPr>
+        <p:blipFill>
+          <a:blip r:embed="rId3"/>
+          <a:stretch>
+            <a:fillRect/>
+          </a:stretch>
+        </p:blipFill>
+        <p:spPr>
+          <a:xfrm>
+            <a:off x="182880" y="1051560"/>
+            <a:ext cx="8778240" cy="4160520"/>
+          </a:xfrm>
+          <a:prstGeom prst="rect">
+            <a:avLst/>
+          </a:prstGeom>
+        </p:spPr>
+      </p:pic>
+      <p:sp>
+        <p:nvSpPr>
+          <p:cNvPr id="5" name="TextBox 4"/>
+          <p:cNvSpPr txBox="1"/>
+          <p:nvPr/>
+        </p:nvSpPr>
+        <p:spPr>
+          <a:xfrm>
+            <a:off x="365760" y="4640580"/>
+            <a:ext cx="8412480" cy="411480"/>
+          </a:xfrm>
+          <a:prstGeom prst="rect">
+            <a:avLst/>
+          </a:prstGeom>
+          <a:noFill/>
+        </p:spPr>
+        <p:txBody>
+          <a:bodyPr wrap="none">
+            <a:spAutoFit/>
+          </a:bodyPr>
+          <a:lstStyle/>
+          <a:p>
+            <a:pPr algn="ctr"/>
+            <a:r>
+              <a:rPr sz="900">
+                <a:solidFill>
+                  <a:srgbClr val="444444"/>
+                </a:solidFill>
+                <a:latin typeface="Courier New"/>
+              </a:rPr>
+              <a:t>Module 1: Malware Scanner  |  Module 2: AI Threat Analyzer (ATLAS)  |  Module 3: Red Team Intel</a:t>
+            </a:r>
           </a:p>
         </p:txBody>
       </p:sp>
